--- a/docs/marketing/Introducing Turas to clients.pptx
+++ b/docs/marketing/Introducing Turas to clients.pptx
@@ -13471,8 +13471,8 @@
         </p:nvSpPr>
         <p:spPr>
           <a:xfrm>
-            <a:off x="838200" y="3556000"/>
-            <a:ext cx="4495800" cy="2286000"/>
+            <a:off x="838200" y="3602300"/>
+            <a:ext cx="4495800" cy="1600200"/>
           </a:xfrm>
           <a:prstGeom prst="rect">
             <a:avLst/>
@@ -13539,6 +13539,19 @@
               <a:t>  Filed away, rarely revisited</a:t>
             </a:r>
           </a:p>
+          <a:p>
+            <a:pPr algn="l">
+              <a:spcBef>
+                <a:spcPts val="600"/>
+              </a:spcBef>
+            </a:pPr>
+            <a:endParaRPr lang="en-GB" sz="1400" dirty="0">
+              <a:solidFill>
+                <a:srgbClr val="9090A8"/>
+              </a:solidFill>
+              <a:latin typeface="Source Sans Pro"/>
+            </a:endParaRPr>
+          </a:p>
         </p:txBody>
       </p:sp>
       <p:sp>
@@ -13615,24 +13628,6 @@
                 <a:latin typeface="Source Sans Pro"/>
               </a:rPr>
               <a:t>  Build &amp; present a narrative without leaving the report</a:t>
-            </a:r>
-          </a:p>
-          <a:p>
-            <a:pPr algn="l">
-              <a:spcBef>
-                <a:spcPts val="200"/>
-              </a:spcBef>
-              <a:buFont typeface="Arial"/>
-              <a:buChar char="✓"/>
-            </a:pPr>
-            <a:r>
-              <a:rPr lang="en-GB" sz="1400" dirty="0">
-                <a:solidFill>
-                  <a:srgbClr val="323367"/>
-                </a:solidFill>
-                <a:latin typeface="Source Sans Pro"/>
-              </a:rPr>
-              <a:t>  Advanced analysis and more in the same file</a:t>
             </a:r>
           </a:p>
         </p:txBody>

--- a/docs/marketing/Introducing Turas to clients.pptx
+++ b/docs/marketing/Introducing Turas to clients.pptx
@@ -10391,7 +10391,7 @@
                 </a:solidFill>
                 <a:latin typeface="Source Sans Pro"/>
               </a:rPr>
-              <a:t>No subscriptions. No licence costs. No installations. You pay per project.</a:t>
+              <a:t>No subscriptions. No licence costs. No installations. </a:t>
             </a:r>
           </a:p>
         </p:txBody>
@@ -11634,7 +11634,7 @@
                 </a:solidFill>
                 <a:latin typeface="Source Sans Pro"/>
               </a:rPr>
-              <a:t>Duncan Brett developed Turas and is a SAMRA-Accredited Researcher with 30+ years in quantitative market research.</a:t>
+              <a:t>Duncan Brett developed Turas and is a SAMRA-Accredited Researcher.</a:t>
             </a:r>
           </a:p>
         </p:txBody>
@@ -13201,17 +13201,14 @@
                 </a:solidFill>
                 <a:latin typeface="Raleway"/>
               </a:rPr>
-              <a:t>Your Data, </a:t>
-            </a:r>
-            <a:r>
-              <a:rPr lang="en-GB" sz="2800" b="1" dirty="0">
-                <a:solidFill>
-                  <a:srgbClr val="CC9900"/>
-                </a:solidFill>
-                <a:latin typeface="Raleway"/>
-              </a:rPr>
-              <a:t>Alive</a:t>
-            </a:r>
+              <a:t>See for yourself</a:t>
+            </a:r>
+            <a:endParaRPr lang="en-GB" sz="2800" b="1" dirty="0">
+              <a:solidFill>
+                <a:srgbClr val="CC9900"/>
+              </a:solidFill>
+              <a:latin typeface="Raleway"/>
+            </a:endParaRPr>
           </a:p>
         </p:txBody>
       </p:sp>
@@ -13518,7 +13515,7 @@
                 </a:solidFill>
                 <a:latin typeface="Source Sans Pro"/>
               </a:rPr>
-              <a:t>  Buried insights, lost context</a:t>
+              <a:t>  Insights disconnected from the data behind them</a:t>
             </a:r>
           </a:p>
           <a:p>
@@ -14596,7 +14593,7 @@
                 </a:solidFill>
                 <a:latin typeface="Source Sans Pro"/>
               </a:rPr>
-              <a:t>Nothing to install. Open a link and go</a:t>
+              <a:t>Nothing to install. Open a file and go</a:t>
             </a:r>
           </a:p>
         </p:txBody>
@@ -14906,7 +14903,7 @@
                 </a:solidFill>
                 <a:latin typeface="Source Sans Pro"/>
               </a:rPr>
-              <a:t>Not a dashboard. Not a PDF. A living report your whole team can explore</a:t>
+              <a:t>Research your whole team can use</a:t>
             </a:r>
           </a:p>
         </p:txBody>

--- a/docs/marketing/Introducing Turas to clients.pptx
+++ b/docs/marketing/Introducing Turas to clients.pptx
@@ -210,7 +210,7 @@
           <a:p>
             <a:fld id="{BB2293FD-1E42-1447-A1A4-389C6E1A364E}" type="datetimeFigureOut">
               <a:rPr lang="en-GB" smtClean="0"/>
-              <a:t>17/03/2026</a:t>
+              <a:t>19/03/2026</a:t>
             </a:fld>
             <a:endParaRPr lang="en-GB" dirty="0"/>
           </a:p>
@@ -1932,7 +1932,7 @@
           <a:p>
             <a:fld id="{A2883654-0045-5F4C-BD43-6C918E968447}" type="datetimeFigureOut">
               <a:rPr lang="en-GB" smtClean="0"/>
-              <a:t>17/03/2026</a:t>
+              <a:t>19/03/2026</a:t>
             </a:fld>
             <a:endParaRPr lang="en-GB" dirty="0"/>
           </a:p>
@@ -2130,7 +2130,7 @@
           <a:p>
             <a:fld id="{A2883654-0045-5F4C-BD43-6C918E968447}" type="datetimeFigureOut">
               <a:rPr lang="en-GB" smtClean="0"/>
-              <a:t>17/03/2026</a:t>
+              <a:t>19/03/2026</a:t>
             </a:fld>
             <a:endParaRPr lang="en-GB" dirty="0"/>
           </a:p>
@@ -2338,7 +2338,7 @@
           <a:p>
             <a:fld id="{A2883654-0045-5F4C-BD43-6C918E968447}" type="datetimeFigureOut">
               <a:rPr lang="en-GB" smtClean="0"/>
-              <a:t>17/03/2026</a:t>
+              <a:t>19/03/2026</a:t>
             </a:fld>
             <a:endParaRPr lang="en-GB" dirty="0"/>
           </a:p>
@@ -2571,7 +2571,7 @@
           <a:p>
             <a:fld id="{A2883654-0045-5F4C-BD43-6C918E968447}" type="datetimeFigureOut">
               <a:rPr lang="en-GB" smtClean="0"/>
-              <a:t>17/03/2026</a:t>
+              <a:t>19/03/2026</a:t>
             </a:fld>
             <a:endParaRPr lang="en-GB" dirty="0"/>
           </a:p>
@@ -2846,7 +2846,7 @@
           <a:p>
             <a:fld id="{A2883654-0045-5F4C-BD43-6C918E968447}" type="datetimeFigureOut">
               <a:rPr lang="en-GB" smtClean="0"/>
-              <a:t>17/03/2026</a:t>
+              <a:t>19/03/2026</a:t>
             </a:fld>
             <a:endParaRPr lang="en-GB" dirty="0"/>
           </a:p>
@@ -3111,7 +3111,7 @@
           <a:p>
             <a:fld id="{A2883654-0045-5F4C-BD43-6C918E968447}" type="datetimeFigureOut">
               <a:rPr lang="en-GB" smtClean="0"/>
-              <a:t>17/03/2026</a:t>
+              <a:t>19/03/2026</a:t>
             </a:fld>
             <a:endParaRPr lang="en-GB" dirty="0"/>
           </a:p>
@@ -3523,7 +3523,7 @@
           <a:p>
             <a:fld id="{A2883654-0045-5F4C-BD43-6C918E968447}" type="datetimeFigureOut">
               <a:rPr lang="en-GB" smtClean="0"/>
-              <a:t>17/03/2026</a:t>
+              <a:t>19/03/2026</a:t>
             </a:fld>
             <a:endParaRPr lang="en-GB" dirty="0"/>
           </a:p>
@@ -3664,7 +3664,7 @@
           <a:p>
             <a:fld id="{A2883654-0045-5F4C-BD43-6C918E968447}" type="datetimeFigureOut">
               <a:rPr lang="en-GB" smtClean="0"/>
-              <a:t>17/03/2026</a:t>
+              <a:t>19/03/2026</a:t>
             </a:fld>
             <a:endParaRPr lang="en-GB" dirty="0"/>
           </a:p>
@@ -3777,7 +3777,7 @@
           <a:p>
             <a:fld id="{A2883654-0045-5F4C-BD43-6C918E968447}" type="datetimeFigureOut">
               <a:rPr lang="en-GB" smtClean="0"/>
-              <a:t>17/03/2026</a:t>
+              <a:t>19/03/2026</a:t>
             </a:fld>
             <a:endParaRPr lang="en-GB" dirty="0"/>
           </a:p>
@@ -4088,7 +4088,7 @@
           <a:p>
             <a:fld id="{A2883654-0045-5F4C-BD43-6C918E968447}" type="datetimeFigureOut">
               <a:rPr lang="en-GB" smtClean="0"/>
-              <a:t>17/03/2026</a:t>
+              <a:t>19/03/2026</a:t>
             </a:fld>
             <a:endParaRPr lang="en-GB" dirty="0"/>
           </a:p>
@@ -4376,7 +4376,7 @@
           <a:p>
             <a:fld id="{A2883654-0045-5F4C-BD43-6C918E968447}" type="datetimeFigureOut">
               <a:rPr lang="en-GB" smtClean="0"/>
-              <a:t>17/03/2026</a:t>
+              <a:t>19/03/2026</a:t>
             </a:fld>
             <a:endParaRPr lang="en-GB" dirty="0"/>
           </a:p>
@@ -4617,7 +4617,7 @@
           <a:p>
             <a:fld id="{A2883654-0045-5F4C-BD43-6C918E968447}" type="datetimeFigureOut">
               <a:rPr lang="en-GB" smtClean="0"/>
-              <a:t>17/03/2026</a:t>
+              <a:t>19/03/2026</a:t>
             </a:fld>
             <a:endParaRPr lang="en-GB" dirty="0"/>
           </a:p>

--- a/docs/marketing/Introducing Turas to clients.pptx
+++ b/docs/marketing/Introducing Turas to clients.pptx
@@ -17,7 +17,7 @@
     <p:sldId id="372" r:id="rId8"/>
     <p:sldId id="395" r:id="rId9"/>
     <p:sldId id="394" r:id="rId10"/>
-    <p:sldId id="389" r:id="rId11"/>
+    <p:sldId id="396" r:id="rId11"/>
     <p:sldId id="390" r:id="rId12"/>
     <p:sldId id="391" r:id="rId13"/>
     <p:sldId id="392" r:id="rId14"/>
@@ -5754,7 +5754,28 @@
                 </a:solidFill>
                 <a:latin typeface="Source Sans Pro"/>
               </a:rPr>
-              <a:t>Browse the interactive report. Filter, compare, switch views — follow wherever the data leads you.</a:t>
+              <a:t>Browse the interactive report. Filter, compare and switch views. </a:t>
+            </a:r>
+          </a:p>
+          <a:p>
+            <a:pPr algn="ctr"/>
+            <a:endParaRPr lang="en-GB" sz="1200" dirty="0">
+              <a:solidFill>
+                <a:srgbClr val="4A5568"/>
+              </a:solidFill>
+              <a:latin typeface="Source Sans Pro"/>
+            </a:endParaRPr>
+          </a:p>
+          <a:p>
+            <a:pPr algn="ctr"/>
+            <a:r>
+              <a:rPr lang="en-GB" sz="1200" dirty="0">
+                <a:solidFill>
+                  <a:srgbClr val="4A5568"/>
+                </a:solidFill>
+                <a:latin typeface="Source Sans Pro"/>
+              </a:rPr>
+              <a:t>Plain-language callouts explain what you're seeing and what it means.</a:t>
             </a:r>
           </a:p>
         </p:txBody>
@@ -5906,7 +5927,7 @@
                 </a:solidFill>
                 <a:latin typeface="Source Sans Pro"/>
               </a:rPr>
-              <a:t>Found something worth sharing? Pin it. Add your own commentary, title it, and build a sequence that tells a clear story. Insert image slides between your pins — qual findings, visuals, or slides from other reports — so the full story sits in one place.</a:t>
+              <a:t>Save key charts, add commentary and arrange them into a clear narrative</a:t>
             </a:r>
           </a:p>
         </p:txBody>
@@ -6058,7 +6079,7 @@
                 </a:solidFill>
                 <a:latin typeface="Source Sans Pro"/>
               </a:rPr>
-              <a:t>Walk stakeholders through your pinned narrative — inside the report itself, or export to PowerPoint or PDF.</a:t>
+              <a:t>Walk stakeholders through your story in-app, or export to PowerPoint or PDF</a:t>
             </a:r>
           </a:p>
         </p:txBody>
@@ -6115,10 +6136,117 @@
           </a:p>
         </p:txBody>
       </p:sp>
+      <p:sp>
+        <p:nvSpPr>
+          <p:cNvPr id="3" name="Rectangle 1">
+            <a:extLst>
+              <a:ext uri="{FF2B5EF4-FFF2-40B4-BE49-F238E27FC236}">
+                <a16:creationId xmlns:a16="http://schemas.microsoft.com/office/drawing/2014/main" id="{CA703AAA-D800-5B10-4FB5-E6384DC4F639}"/>
+              </a:ext>
+            </a:extLst>
+          </p:cNvPr>
+          <p:cNvSpPr>
+            <a:spLocks noChangeArrowheads="1"/>
+          </p:cNvSpPr>
+          <p:nvPr/>
+        </p:nvSpPr>
+        <p:spPr bwMode="auto">
+          <a:xfrm>
+            <a:off x="0" y="0"/>
+            <a:ext cx="12192000" cy="0"/>
+          </a:xfrm>
+          <a:prstGeom prst="rect">
+            <a:avLst/>
+          </a:prstGeom>
+          <a:noFill/>
+          <a:ln>
+            <a:noFill/>
+          </a:ln>
+          <a:effectLst/>
+          <a:extLst>
+            <a:ext uri="{909E8E84-426E-40DD-AFC4-6F175D3DCCD1}">
+              <a14:hiddenFill xmlns:a14="http://schemas.microsoft.com/office/drawing/2010/main">
+                <a:solidFill>
+                  <a:schemeClr val="accent1"/>
+                </a:solidFill>
+              </a14:hiddenFill>
+            </a:ext>
+            <a:ext uri="{91240B29-F687-4F45-9708-019B960494DF}">
+              <a14:hiddenLine xmlns:a14="http://schemas.microsoft.com/office/drawing/2010/main" w="9525">
+                <a:solidFill>
+                  <a:schemeClr val="tx1"/>
+                </a:solidFill>
+                <a:miter lim="800000"/>
+                <a:headEnd/>
+                <a:tailEnd/>
+              </a14:hiddenLine>
+            </a:ext>
+            <a:ext uri="{AF507438-7753-43E0-B8FC-AC1667EBCBE1}">
+              <a14:hiddenEffects xmlns:a14="http://schemas.microsoft.com/office/drawing/2010/main">
+                <a:effectLst>
+                  <a:outerShdw dist="35921" dir="2700000" algn="ctr" rotWithShape="0">
+                    <a:schemeClr val="bg2"/>
+                  </a:outerShdw>
+                </a:effectLst>
+              </a14:hiddenEffects>
+            </a:ext>
+          </a:extLst>
+        </p:spPr>
+        <p:txBody>
+          <a:bodyPr vert="horz" wrap="none" lIns="91440" tIns="45720" rIns="91440" bIns="45720" numCol="1" anchor="ctr" anchorCtr="0" compatLnSpc="1">
+            <a:prstTxWarp prst="textNoShape">
+              <a:avLst/>
+            </a:prstTxWarp>
+            <a:spAutoFit/>
+          </a:bodyPr>
+          <a:lstStyle/>
+          <a:p>
+            <a:pPr marL="0" marR="0" lvl="0" indent="0" algn="l" defTabSz="914400" rtl="0" eaLnBrk="0" fontAlgn="base" latinLnBrk="0" hangingPunct="0">
+              <a:lnSpc>
+                <a:spcPct val="100000"/>
+              </a:lnSpc>
+              <a:spcBef>
+                <a:spcPct val="0"/>
+              </a:spcBef>
+              <a:spcAft>
+                <a:spcPct val="0"/>
+              </a:spcAft>
+              <a:buClrTx/>
+              <a:buSzTx/>
+              <a:buFontTx/>
+              <a:buNone/>
+              <a:tabLst/>
+            </a:pPr>
+            <a:r>
+              <a:rPr kumimoji="0" lang="en-US" altLang="en-US" sz="1800" b="0" i="0" u="none" strike="noStrike" cap="none" normalizeH="0" baseline="0">
+                <a:ln>
+                  <a:noFill/>
+                </a:ln>
+                <a:solidFill>
+                  <a:srgbClr val="000000"/>
+                </a:solidFill>
+                <a:effectLst/>
+                <a:latin typeface="-webkit-standard"/>
+              </a:rPr>
+              <a:t>—</a:t>
+            </a:r>
+            <a:endParaRPr kumimoji="0" lang="en-US" altLang="en-US" sz="1800" b="0" i="0" u="none" strike="noStrike" cap="none" normalizeH="0" baseline="0">
+              <a:ln>
+                <a:noFill/>
+              </a:ln>
+              <a:solidFill>
+                <a:schemeClr val="tx1"/>
+              </a:solidFill>
+              <a:effectLst/>
+              <a:latin typeface="Arial" panose="020B0604020202020204" pitchFamily="34" charset="0"/>
+            </a:endParaRPr>
+          </a:p>
+        </p:txBody>
+      </p:sp>
     </p:spTree>
     <p:extLst>
       <p:ext uri="{BB962C8B-B14F-4D97-AF65-F5344CB8AC3E}">
-        <p14:creationId xmlns:p14="http://schemas.microsoft.com/office/powerpoint/2010/main" val="1837788774"/>
+        <p14:creationId xmlns:p14="http://schemas.microsoft.com/office/powerpoint/2010/main" val="131432829"/>
       </p:ext>
     </p:extLst>
   </p:cSld>
@@ -6159,7 +6287,7 @@
         </p:nvSpPr>
         <p:spPr>
           <a:xfrm>
-            <a:off x="0" y="0"/>
+            <a:off x="0" y="10510"/>
             <a:ext cx="12192000" cy="6858000"/>
           </a:xfrm>
           <a:prstGeom prst="rect">
@@ -7290,7 +7418,7 @@
         </p:nvSpPr>
         <p:spPr>
           <a:xfrm>
-            <a:off x="762000" y="5207000"/>
+            <a:off x="762000" y="5354144"/>
             <a:ext cx="10668000" cy="635000"/>
           </a:xfrm>
           <a:prstGeom prst="roundRect">
@@ -7317,7 +7445,19 @@
                 </a:solidFill>
                 <a:latin typeface="Source Sans Pro"/>
               </a:rPr>
-              <a:t>Multiple modules can be combined into a single report</a:t>
+              <a:t>Multiple modules can be combined into a single report.</a:t>
+            </a:r>
+          </a:p>
+          <a:p>
+            <a:pPr algn="ctr"/>
+            <a:r>
+              <a:rPr lang="en-GB" sz="1400" i="1" dirty="0">
+                <a:solidFill>
+                  <a:srgbClr val="CC9900"/>
+                </a:solidFill>
+                <a:latin typeface="Source Sans Pro"/>
+              </a:rPr>
+              <a:t>Advanced modules include plain-language callouts that guide users through the statistics — so the outputs are understood, not just delivered.</a:t>
             </a:r>
           </a:p>
         </p:txBody>

--- a/docs/marketing/Introducing Turas to clients.pptx
+++ b/docs/marketing/Introducing Turas to clients.pptx
@@ -5316,7 +5316,7 @@
         </p:nvSpPr>
         <p:spPr>
           <a:xfrm>
-            <a:off x="0" y="0"/>
+            <a:off x="0" y="8389"/>
             <a:ext cx="12192000" cy="6858000"/>
           </a:xfrm>
           <a:prstGeom prst="rect">
@@ -6079,7 +6079,7 @@
                 </a:solidFill>
                 <a:latin typeface="Source Sans Pro"/>
               </a:rPr>
-              <a:t>Walk stakeholders through your story in-app, or export to PowerPoint or PDF</a:t>
+              <a:t>Walk stakeholders through your story in-file, or export to PowerPoint or PDF</a:t>
             </a:r>
           </a:p>
         </p:txBody>

--- a/docs/marketing/Introducing Turas to clients.pptx
+++ b/docs/marketing/Introducing Turas to clients.pptx
@@ -210,7 +210,7 @@
           <a:p>
             <a:fld id="{BB2293FD-1E42-1447-A1A4-389C6E1A364E}" type="datetimeFigureOut">
               <a:rPr lang="en-GB" smtClean="0"/>
-              <a:t>19/03/2026</a:t>
+              <a:t>24/03/2026</a:t>
             </a:fld>
             <a:endParaRPr lang="en-GB" dirty="0"/>
           </a:p>
@@ -1932,7 +1932,7 @@
           <a:p>
             <a:fld id="{A2883654-0045-5F4C-BD43-6C918E968447}" type="datetimeFigureOut">
               <a:rPr lang="en-GB" smtClean="0"/>
-              <a:t>19/03/2026</a:t>
+              <a:t>24/03/2026</a:t>
             </a:fld>
             <a:endParaRPr lang="en-GB" dirty="0"/>
           </a:p>
@@ -2130,7 +2130,7 @@
           <a:p>
             <a:fld id="{A2883654-0045-5F4C-BD43-6C918E968447}" type="datetimeFigureOut">
               <a:rPr lang="en-GB" smtClean="0"/>
-              <a:t>19/03/2026</a:t>
+              <a:t>24/03/2026</a:t>
             </a:fld>
             <a:endParaRPr lang="en-GB" dirty="0"/>
           </a:p>
@@ -2338,7 +2338,7 @@
           <a:p>
             <a:fld id="{A2883654-0045-5F4C-BD43-6C918E968447}" type="datetimeFigureOut">
               <a:rPr lang="en-GB" smtClean="0"/>
-              <a:t>19/03/2026</a:t>
+              <a:t>24/03/2026</a:t>
             </a:fld>
             <a:endParaRPr lang="en-GB" dirty="0"/>
           </a:p>
@@ -2571,7 +2571,7 @@
           <a:p>
             <a:fld id="{A2883654-0045-5F4C-BD43-6C918E968447}" type="datetimeFigureOut">
               <a:rPr lang="en-GB" smtClean="0"/>
-              <a:t>19/03/2026</a:t>
+              <a:t>24/03/2026</a:t>
             </a:fld>
             <a:endParaRPr lang="en-GB" dirty="0"/>
           </a:p>
@@ -2846,7 +2846,7 @@
           <a:p>
             <a:fld id="{A2883654-0045-5F4C-BD43-6C918E968447}" type="datetimeFigureOut">
               <a:rPr lang="en-GB" smtClean="0"/>
-              <a:t>19/03/2026</a:t>
+              <a:t>24/03/2026</a:t>
             </a:fld>
             <a:endParaRPr lang="en-GB" dirty="0"/>
           </a:p>
@@ -3111,7 +3111,7 @@
           <a:p>
             <a:fld id="{A2883654-0045-5F4C-BD43-6C918E968447}" type="datetimeFigureOut">
               <a:rPr lang="en-GB" smtClean="0"/>
-              <a:t>19/03/2026</a:t>
+              <a:t>24/03/2026</a:t>
             </a:fld>
             <a:endParaRPr lang="en-GB" dirty="0"/>
           </a:p>
@@ -3523,7 +3523,7 @@
           <a:p>
             <a:fld id="{A2883654-0045-5F4C-BD43-6C918E968447}" type="datetimeFigureOut">
               <a:rPr lang="en-GB" smtClean="0"/>
-              <a:t>19/03/2026</a:t>
+              <a:t>24/03/2026</a:t>
             </a:fld>
             <a:endParaRPr lang="en-GB" dirty="0"/>
           </a:p>
@@ -3664,7 +3664,7 @@
           <a:p>
             <a:fld id="{A2883654-0045-5F4C-BD43-6C918E968447}" type="datetimeFigureOut">
               <a:rPr lang="en-GB" smtClean="0"/>
-              <a:t>19/03/2026</a:t>
+              <a:t>24/03/2026</a:t>
             </a:fld>
             <a:endParaRPr lang="en-GB" dirty="0"/>
           </a:p>
@@ -3777,7 +3777,7 @@
           <a:p>
             <a:fld id="{A2883654-0045-5F4C-BD43-6C918E968447}" type="datetimeFigureOut">
               <a:rPr lang="en-GB" smtClean="0"/>
-              <a:t>19/03/2026</a:t>
+              <a:t>24/03/2026</a:t>
             </a:fld>
             <a:endParaRPr lang="en-GB" dirty="0"/>
           </a:p>
@@ -4088,7 +4088,7 @@
           <a:p>
             <a:fld id="{A2883654-0045-5F4C-BD43-6C918E968447}" type="datetimeFigureOut">
               <a:rPr lang="en-GB" smtClean="0"/>
-              <a:t>19/03/2026</a:t>
+              <a:t>24/03/2026</a:t>
             </a:fld>
             <a:endParaRPr lang="en-GB" dirty="0"/>
           </a:p>
@@ -4376,7 +4376,7 @@
           <a:p>
             <a:fld id="{A2883654-0045-5F4C-BD43-6C918E968447}" type="datetimeFigureOut">
               <a:rPr lang="en-GB" smtClean="0"/>
-              <a:t>19/03/2026</a:t>
+              <a:t>24/03/2026</a:t>
             </a:fld>
             <a:endParaRPr lang="en-GB" dirty="0"/>
           </a:p>
@@ -4617,7 +4617,7 @@
           <a:p>
             <a:fld id="{A2883654-0045-5F4C-BD43-6C918E968447}" type="datetimeFigureOut">
               <a:rPr lang="en-GB" smtClean="0"/>
-              <a:t>19/03/2026</a:t>
+              <a:t>24/03/2026</a:t>
             </a:fld>
             <a:endParaRPr lang="en-GB" dirty="0"/>
           </a:p>
@@ -7150,7 +7150,7 @@
                 </a:solidFill>
                 <a:latin typeface="Source Sans Pro"/>
               </a:rPr>
-              <a:t>Precise preference rankings</a:t>
+              <a:t>Precise preference rankings with TURF and a simulator</a:t>
             </a:r>
           </a:p>
         </p:txBody>
@@ -7235,7 +7235,7 @@
                 </a:solidFill>
                 <a:latin typeface="Source Sans Pro"/>
               </a:rPr>
-              <a:t>Van Westendorp, Gabor-Granger and monadic  models</a:t>
+              <a:t>Van Westendorp, Gabor-Granger with simulators and monadic  models</a:t>
             </a:r>
           </a:p>
         </p:txBody>

--- a/docs/marketing/Introducing Turas to clients.pptx
+++ b/docs/marketing/Introducing Turas to clients.pptx
@@ -1714,7 +1714,7 @@
           <a:bodyPr/>
           <a:lstStyle/>
           <a:p>
-            <a:endParaRPr lang="en-GB"/>
+            <a:endParaRPr lang="en-GB" dirty="0"/>
           </a:p>
         </p:txBody>
       </p:sp>
@@ -6218,7 +6218,7 @@
               <a:tabLst/>
             </a:pPr>
             <a:r>
-              <a:rPr kumimoji="0" lang="en-US" altLang="en-US" sz="1800" b="0" i="0" u="none" strike="noStrike" cap="none" normalizeH="0" baseline="0">
+              <a:rPr kumimoji="0" lang="en-US" altLang="en-US" sz="1800" b="0" i="0" u="none" strike="noStrike" cap="none" normalizeH="0" baseline="0" dirty="0">
                 <a:ln>
                   <a:noFill/>
                 </a:ln>
@@ -6230,7 +6230,7 @@
               </a:rPr>
               <a:t>—</a:t>
             </a:r>
-            <a:endParaRPr kumimoji="0" lang="en-US" altLang="en-US" sz="1800" b="0" i="0" u="none" strike="noStrike" cap="none" normalizeH="0" baseline="0">
+            <a:endParaRPr kumimoji="0" lang="en-US" altLang="en-US" sz="1800" b="0" i="0" u="none" strike="noStrike" cap="none" normalizeH="0" baseline="0" dirty="0">
               <a:ln>
                 <a:noFill/>
               </a:ln>
@@ -9020,42 +9020,6 @@
       </p:sp>
       <p:sp>
         <p:nvSpPr>
-          <p:cNvPr id="207" name="BrandMark"/>
-          <p:cNvSpPr/>
-          <p:nvPr/>
-        </p:nvSpPr>
-        <p:spPr>
-          <a:xfrm>
-            <a:off x="4191000" y="5461000"/>
-            <a:ext cx="3810000" cy="381000"/>
-          </a:xfrm>
-          <a:prstGeom prst="rect">
-            <a:avLst/>
-          </a:prstGeom>
-          <a:noFill/>
-          <a:ln>
-            <a:noFill/>
-          </a:ln>
-        </p:spPr>
-        <p:txBody>
-          <a:bodyPr wrap="square" lIns="0" tIns="0" rIns="0" bIns="0" anchor="ctr"/>
-          <a:lstStyle/>
-          <a:p>
-            <a:pPr algn="ctr"/>
-            <a:r>
-              <a:rPr lang="en-GB" sz="1000" dirty="0">
-                <a:solidFill>
-                  <a:srgbClr val="6B7280"/>
-                </a:solidFill>
-                <a:latin typeface="Source Sans Pro"/>
-              </a:rPr>
-              <a:t>The Research LampPost</a:t>
-            </a:r>
-          </a:p>
-        </p:txBody>
-      </p:sp>
-      <p:sp>
-        <p:nvSpPr>
           <p:cNvPr id="208" name="BotAcc"/>
           <p:cNvSpPr/>
           <p:nvPr/>
@@ -9112,6 +9076,36 @@
           </a:p>
         </p:txBody>
       </p:sp>
+      <p:pic>
+        <p:nvPicPr>
+          <p:cNvPr id="8" name="Picture 7" descr="A logo with a yellow and blue diamond&#10;&#10;AI-generated content may be incorrect.">
+            <a:extLst>
+              <a:ext uri="{FF2B5EF4-FFF2-40B4-BE49-F238E27FC236}">
+                <a16:creationId xmlns:a16="http://schemas.microsoft.com/office/drawing/2014/main" id="{13F92F90-D33B-0689-B5C0-AF4DB99244D7}"/>
+              </a:ext>
+            </a:extLst>
+          </p:cNvPr>
+          <p:cNvPicPr>
+            <a:picLocks noChangeAspect="1"/>
+          </p:cNvPicPr>
+          <p:nvPr/>
+        </p:nvPicPr>
+        <p:blipFill>
+          <a:blip r:embed="rId2"/>
+          <a:stretch>
+            <a:fillRect/>
+          </a:stretch>
+        </p:blipFill>
+        <p:spPr>
+          <a:xfrm>
+            <a:off x="4941114" y="4595977"/>
+            <a:ext cx="2365231" cy="1665123"/>
+          </a:xfrm>
+          <a:prstGeom prst="rect">
+            <a:avLst/>
+          </a:prstGeom>
+        </p:spPr>
+      </p:pic>
     </p:spTree>
     <p:extLst>
       <p:ext uri="{BB962C8B-B14F-4D97-AF65-F5344CB8AC3E}">

--- a/docs/marketing/Introducing Turas to clients.pptx
+++ b/docs/marketing/Introducing Turas to clients.pptx
@@ -12336,7 +12336,7 @@
                 </a:solidFill>
                 <a:latin typeface="Source Sans Pro"/>
               </a:rPr>
-              <a:t>Your data is analysed entirely on our own hardware — never processed by a third-party analytical platform or shared with an external service.</a:t>
+              <a:t>Your survey data is analysed entirely within our own environment — the Turas analytical process runs on our own systems, with no third-party platform involved in processing your data.</a:t>
             </a:r>
           </a:p>
         </p:txBody>
